--- a/rbb-drive/product_7/anchor_reading_passage.pptx
+++ b/rbb-drive/product_7/anchor_reading_passage.pptx
@@ -1702,7 +1702,7 @@
           <a:lstStyle/>
           <a:p>
             <a:r>
-              <a:rPr lang="en-US" sz="1200" dirty="0" b="0">
+              <a:rPr lang="en-US" sz="1200" dirty="0" b="1">
                 <a:latin typeface="Open Sans" pitchFamily="2" charset="0"/>
                 <a:ea typeface="Open Sans" pitchFamily="2" charset="0"/>
                 <a:cs typeface="Open Sans" pitchFamily="2" charset="0"/>
@@ -1753,7 +1753,7 @@
           <a:p/>
           <a:p>
             <a:r>
-              <a:rPr lang="en-US" sz="1200" dirty="0" b="0">
+              <a:rPr lang="en-US" sz="1200" dirty="0" b="1">
                 <a:latin typeface="Open Sans" pitchFamily="2" charset="0"/>
                 <a:ea typeface="Open Sans" pitchFamily="2" charset="0"/>
                 <a:cs typeface="Open Sans" pitchFamily="2" charset="0"/>

--- a/rbb-drive/product_7/anchor_reading_passage.pptx
+++ b/rbb-drive/product_7/anchor_reading_passage.pptx
@@ -1259,12 +1259,20 @@
           <a:lstStyle/>
           <a:p>
             <a:r>
-              <a:rPr lang="en-US" sz="1200" dirty="0" b="0">
-                <a:latin typeface="Open Sans" pitchFamily="2" charset="0"/>
-                <a:ea typeface="Open Sans" pitchFamily="2" charset="0"/>
-                <a:cs typeface="Open Sans" pitchFamily="2" charset="0"/>
-              </a:rPr>
-              <a:t>• Cite textual evidence to support analysis of what the text says explicitly</a:t>
+              <a:rPr lang="en-US" sz="1200" dirty="0" b="1">
+                <a:latin typeface="Open Sans" pitchFamily="2" charset="0"/>
+                <a:ea typeface="Open Sans" pitchFamily="2" charset="0"/>
+                <a:cs typeface="Open Sans" pitchFamily="2" charset="0"/>
+              </a:rPr>
+              <a:t>Objectives:</a:t>
+            </a:r>
+            <a:r>
+              <a:rPr lang="en-US" sz="1200" dirty="0" b="0">
+                <a:latin typeface="Open Sans" pitchFamily="2" charset="0"/>
+                <a:ea typeface="Open Sans" pitchFamily="2" charset="0"/>
+                <a:cs typeface="Open Sans" pitchFamily="2" charset="0"/>
+              </a:rPr>
+              <a:t> • Cite textual evidence to support analysis of what the text says explicitly</a:t>
             </a:r>
           </a:p>
           <a:p>
@@ -1302,12 +1310,20 @@
           <a:lstStyle/>
           <a:p>
             <a:r>
-              <a:rPr lang="en-US" sz="1200" dirty="0" b="0">
-                <a:latin typeface="Open Sans" pitchFamily="2" charset="0"/>
-                <a:ea typeface="Open Sans" pitchFamily="2" charset="0"/>
-                <a:cs typeface="Open Sans" pitchFamily="2" charset="0"/>
-              </a:rPr>
-              <a:t>Read the passage carefully and answer the questions that follow.</a:t>
+              <a:rPr lang="en-US" sz="1200" dirty="0" b="1">
+                <a:latin typeface="Open Sans" pitchFamily="2" charset="0"/>
+                <a:ea typeface="Open Sans" pitchFamily="2" charset="0"/>
+                <a:cs typeface="Open Sans" pitchFamily="2" charset="0"/>
+              </a:rPr>
+              <a:t>Directions:</a:t>
+            </a:r>
+            <a:r>
+              <a:rPr lang="en-US" sz="1200" dirty="0" b="0">
+                <a:latin typeface="Open Sans" pitchFamily="2" charset="0"/>
+                <a:ea typeface="Open Sans" pitchFamily="2" charset="0"/>
+                <a:cs typeface="Open Sans" pitchFamily="2" charset="0"/>
+              </a:rPr>
+              <a:t> Read the passage carefully and answer the questions that follow.</a:t>
             </a:r>
           </a:p>
         </p:txBody>
